--- a/samples/presentations/产品路线图-Q3-2026.pptx
+++ b/samples/presentations/产品路线图-Q3-2026.pptx
@@ -114,6 +114,98 @@
     </a:lvl9pPr>
   </p:defaultTextStyle>
 </p:presentation>
+</file>
+
+<file path=ppt/charts/chart1.xml><?xml version="1.0" encoding="utf-8"?>
+<c:chartSpace xmlns:c="http://schemas.openxmlformats.org/drawingml/2006/chart" xmlns:a="http://schemas.openxmlformats.org/drawingml/2006/main" xmlns:r="http://schemas.openxmlformats.org/officeDocument/2006/relationships">
+  <c:chart>
+    <c:autoTitleDeleted val="0"/>
+    <c:plotArea>
+      <c:pieChart>
+        <c:varyColors val="1"/>
+        <c:ser>
+          <c:idx val="0"/>
+          <c:order val="0"/>
+          <c:tx>
+            <c:strRef>
+              <c:f>Sheet1!$B$1</c:f>
+              <c:strCache>
+                <c:ptCount val="1"/>
+                <c:pt idx="0">
+                  <c:v>市场份额</c:v>
+                </c:pt>
+              </c:strCache>
+            </c:strRef>
+          </c:tx>
+          <c:cat>
+            <c:strRef>
+              <c:f>Sheet1!$A$2:$A$6</c:f>
+              <c:strCache>
+                <c:ptCount val="5"/>
+                <c:pt idx="0">
+                  <c:v>Jasper</c:v>
+                </c:pt>
+                <c:pt idx="1">
+                  <c:v>Copy.ai</c:v>
+                </c:pt>
+                <c:pt idx="2">
+                  <c:v>Notion AI</c:v>
+                </c:pt>
+                <c:pt idx="3">
+                  <c:v>其他</c:v>
+                </c:pt>
+                <c:pt idx="4">
+                  <c:v>i-Write 目标</c:v>
+                </c:pt>
+              </c:strCache>
+            </c:strRef>
+          </c:cat>
+          <c:val>
+            <c:numRef>
+              <c:f>Sheet1!$B$2:$B$6</c:f>
+              <c:numCache>
+                <c:formatCode>General</c:formatCode>
+                <c:ptCount val="5"/>
+                <c:pt idx="0">
+                  <c:v>35</c:v>
+                </c:pt>
+                <c:pt idx="1">
+                  <c:v>25</c:v>
+                </c:pt>
+                <c:pt idx="2">
+                  <c:v>20</c:v>
+                </c:pt>
+                <c:pt idx="3">
+                  <c:v>10</c:v>
+                </c:pt>
+                <c:pt idx="4">
+                  <c:v>10</c:v>
+                </c:pt>
+              </c:numCache>
+            </c:numRef>
+          </c:val>
+        </c:ser>
+      </c:pieChart>
+    </c:plotArea>
+    <c:legend>
+      <c:overlay val="0"/>
+    </c:legend>
+    <c:dispBlanksAs val="gap"/>
+  </c:chart>
+  <c:txPr>
+    <a:bodyPr/>
+    <a:lstStyle/>
+    <a:p>
+      <a:pPr>
+        <a:defRPr sz="1800"/>
+      </a:pPr>
+      <a:endParaRPr lang="en-US"/>
+    </a:p>
+  </c:txPr>
+  <c:externalData r:id="rId1">
+    <c:autoUpdate val="0"/>
+  </c:externalData>
+</c:chartSpace>
 </file>
 
 <file path=ppt/slideLayouts/slideLayout1.xml><?xml version="1.0" encoding="utf-8"?>
@@ -3540,16 +3632,34 @@
           </a:p>
         </p:txBody>
       </p:sp>
-      <p:sp>
-        <p:nvSpPr>
-          <p:cNvPr id="3" name="TextBox 2"/>
+      <p:graphicFrame>
+        <p:nvGraphicFramePr>
+          <p:cNvPr id="3" name="Chart 2"/>
+          <p:cNvGraphicFramePr>
+            <a:graphicFrameLocks noGrp="1"/>
+          </p:cNvGraphicFramePr>
+          <p:nvPr/>
+        </p:nvGraphicFramePr>
+        <p:xfrm>
+          <a:off x="914400" y="1371600"/>
+          <a:ext cx="4572000" cy="4572000"/>
+        </p:xfrm>
+        <a:graphic>
+          <a:graphicData uri="http://schemas.openxmlformats.org/drawingml/2006/chart">
+            <c:chart xmlns:c="http://schemas.openxmlformats.org/drawingml/2006/chart" r:id="rId2"/>
+          </a:graphicData>
+        </a:graphic>
+      </p:graphicFrame>
+      <p:sp>
+        <p:nvSpPr>
+          <p:cNvPr id="4" name="TextBox 3"/>
           <p:cNvSpPr txBox="1"/>
           <p:nvPr/>
         </p:nvSpPr>
         <p:spPr>
           <a:xfrm>
-            <a:off x="914400" y="1828800"/>
-            <a:ext cx="10058400" cy="3657600"/>
+            <a:off x="6400800" y="1828800"/>
+            <a:ext cx="4572000" cy="3657600"/>
           </a:xfrm>
           <a:prstGeom prst="rect">
             <a:avLst/>
@@ -3565,8 +3675,8 @@
           <a:p>
             <a:pPr algn="l"/>
             <a:r>
-              <a:t>全球企业内容生成市场规模：$4.2B（2026 年）</a:t>
-              <a:rPr sz="2000">
+              <a:t>全球市场规模：$4.2B（2026）</a:t>
+              <a:rPr sz="1800">
                 <a:solidFill>
                   <a:srgbClr val="333333"/>
                 </a:solidFill>
@@ -3579,8 +3689,8 @@
           <a:p>
             <a:pPr algn="l"/>
             <a:r>
-              <a:t>年增长率：28%（2026-2030）</a:t>
-              <a:rPr sz="2000">
+              <a:t>年增长率：28%</a:t>
+              <a:rPr sz="1800">
                 <a:solidFill>
                   <a:srgbClr val="333333"/>
                 </a:solidFill>
@@ -3593,8 +3703,8 @@
           <a:p>
             <a:pPr algn="l"/>
             <a:r>
-              <a:t>i-Write 目标市场：$420M（10% 市场份额）</a:t>
-              <a:rPr sz="2000">
+              <a:t>i-Write 目标：$420M</a:t>
+              <a:rPr sz="1800">
                 <a:solidFill>
                   <a:srgbClr val="333333"/>
                 </a:solidFill>
@@ -3608,7 +3718,7 @@
             <a:pPr algn="l"/>
             <a:r>
               <a:t/>
-              <a:rPr sz="2000">
+              <a:rPr sz="1800">
                 <a:solidFill>
                   <a:srgbClr val="333333"/>
                 </a:solidFill>
@@ -3621,8 +3731,8 @@
           <a:p>
             <a:pPr algn="l"/>
             <a:r>
-              <a:t>竞品：Jasper ($49) / Copy.ai ($36) / Notion AI ($10)</a:t>
-              <a:rPr sz="2000">
+              <a:t>竞品定价：</a:t>
+              <a:rPr sz="1800">
                 <a:solidFill>
                   <a:srgbClr val="333333"/>
                 </a:solidFill>
@@ -3635,8 +3745,36 @@
           <a:p>
             <a:pPr algn="l"/>
             <a:r>
-              <a:t>i-Write: $19/月 — 溯源 + 知识库 + Trust Score</a:t>
-              <a:rPr sz="2000">
+              <a:t>Jasper: $49/月</a:t>
+              <a:rPr sz="1800">
+                <a:solidFill>
+                  <a:srgbClr val="333333"/>
+                </a:solidFill>
+                <a:latin typeface="Helvetica Neue"/>
+                <a:ea typeface="PingFang SC"/>
+                <a:cs typeface="PingFang SC"/>
+              </a:rPr>
+            </a:r>
+          </a:p>
+          <a:p>
+            <a:pPr algn="l"/>
+            <a:r>
+              <a:t>Copy.ai: $36/月</a:t>
+              <a:rPr sz="1800">
+                <a:solidFill>
+                  <a:srgbClr val="333333"/>
+                </a:solidFill>
+                <a:latin typeface="Helvetica Neue"/>
+                <a:ea typeface="PingFang SC"/>
+                <a:cs typeface="PingFang SC"/>
+              </a:rPr>
+            </a:r>
+          </a:p>
+          <a:p>
+            <a:pPr algn="l"/>
+            <a:r>
+              <a:t>i-Write: $19/月</a:t>
+              <a:rPr sz="1800">
                 <a:solidFill>
                   <a:srgbClr val="333333"/>
                 </a:solidFill>
